--- a/decks/maths-directed/maths-directed_ch1_number-line-ordering.pptx
+++ b/decks/maths-directed/maths-directed_ch1_number-line-ordering.pptx
@@ -121,47 +121,47 @@
   <p:extLst>
     <p:ext uri="{521415D9-36F7-43E2-AB2F-B90AF26B5E84}">
       <p14:sectionLst xmlns:p14="http://schemas.microsoft.com/office/powerpoint/2010/main">
-        <p14:section name="Opening" id="{18780202-750a-5aaf-2399-31225675d975}">
+        <p14:section name="Opening" id="{1f4384d3-4c7f-370a-cd0f-2e3b782ccfd0}">
           <p14:sldIdLst>
             <p14:sldId id="256"/>
           </p14:sldIdLst>
         </p14:section>
-        <p14:section name="Gate" id="{03fbf7af-e85c-0270-c54f-90ec4209baa7}">
+        <p14:section name="Gate" id="{38d5eece-b98d-6468-9ad6-1efd9b7e1a6f}">
           <p14:sldIdLst>
             <p14:sldId id="257"/>
             <p14:sldId id="258"/>
           </p14:sldIdLst>
         </p14:section>
-        <p14:section name="Pre-teach" id="{d5cdddc5-497a-0db4-8563-0ea75d88ed19}">
+        <p14:section name="Pre-teach" id="{12eb9cb6-4cbd-8523-3e5d-33db2cc73167}">
           <p14:sldIdLst>
             <p14:sldId id="259"/>
           </p14:sldIdLst>
         </p14:section>
-        <p14:section name="Read-along" id="{a23af2b9-fc57-ff1a-a4ec-7b4a599053b5}">
+        <p14:section name="Read-along" id="{31251899-dc89-0771-ac13-cb809c20f322}">
           <p14:sldIdLst>
             <p14:sldId id="260"/>
             <p14:sldId id="261"/>
           </p14:sldIdLst>
         </p14:section>
-        <p14:section name="Teach" id="{df0ca083-f62a-0e51-6f0a-4a75089464c6}">
+        <p14:section name="Teach" id="{af35b00a-9148-9b30-03a5-3c89a029cf99}">
           <p14:sldIdLst>
             <p14:sldId id="262"/>
             <p14:sldId id="263"/>
             <p14:sldId id="264"/>
           </p14:sldIdLst>
         </p14:section>
-        <p14:section name="Routes" id="{78421a1f-e74d-de23-41f2-f02a127449ba}">
+        <p14:section name="Routes" id="{4e2b87b0-a36d-2e05-9131-fd7c9a9d8fa5}">
           <p14:sldIdLst>
             <p14:sldId id="265"/>
             <p14:sldId id="266"/>
           </p14:sldIdLst>
         </p14:section>
-        <p14:section name="Close" id="{6f7fb0d9-c96f-e923-e5bd-183c0a9d327b}">
+        <p14:section name="Close" id="{a42a9907-d6f2-ddca-0194-14d810c40ad5}">
           <p14:sldIdLst>
             <p14:sldId id="267"/>
           </p14:sldIdLst>
         </p14:section>
-        <p14:section name="Answers" id="{96ec065f-ec5b-768d-6264-a75ff1400414}">
+        <p14:section name="Answers" id="{9eb3d46b-263d-a4cb-950e-c07d722a972a}">
           <p14:sldIdLst>
             <p14:sldId id="268"/>
             <p14:sldId id="269"/>
@@ -1217,7 +1217,7 @@
             <a:r>
               <a:rPr lang="en-US" dirty="0"/>
               <a:t>Do now — retrieval. Silent, no notes, no help: recall comes before any support. Give about four minutes.
-1. Which number is greater than −4?  →  C   −2
+1. Which number is greater than −4?  →  D   −2
 2. Count down in ones: 2, 1, 0, … What is the next number?  →  −1
 3. Which list is in ascending order?  →  B   −4, −1, 2, 5
 Circulate: who gets 3/3 (Stretch route), 2/3 (Core), 0–1 (Support)? Use this to route pupils later in the lesson.</a:t>
@@ -1309,7 +1309,7 @@
             <a:r>
               <a:rPr lang="en-US" dirty="0"/>
               <a:t>Answers — pupils mark their own in a different colour, then hands up for 3/3, 2/3, 1/3.
-1. C   −2. −2 is the closest to zero, so it is the furthest right. It is the only one greater than −4.
+1. D   −2. −2 is the closest to zero, so it is the furthest right. It is the only one greater than −4.
 2. −1. After zero comes −1. Do not stop at zero.
 3. B   −4, −1, 2, 5. Ascending means smallest first. −4 is further left than −1, so −4 comes first.
 Say the route each score points to: 3/3 Stretch, 2/3 Core, 0–1 Support. Pupils may choose to move up.</a:t>
@@ -4855,7 +4855,7 @@
                 <a:ea typeface="Calibri" pitchFamily="34" charset="-122"/>
                 <a:cs typeface="Calibri" pitchFamily="34" charset="-120"/>
               </a:rPr>
-              <a:t>−6 &gt; −1      </a:t>
+              <a:t>−3 &lt; −8      </a:t>
             </a:r>
             <a:pPr algn="ctr" indent="0" marL="0">
               <a:buNone/>
@@ -4883,7 +4883,7 @@
                 <a:ea typeface="Calibri" pitchFamily="34" charset="-122"/>
                 <a:cs typeface="Calibri" pitchFamily="34" charset="-120"/>
               </a:rPr>
-              <a:t>−3 &lt; −8      </a:t>
+              <a:t>0 &lt; −2      </a:t>
             </a:r>
             <a:pPr algn="ctr" indent="0" marL="0">
               <a:buNone/>
@@ -4939,7 +4939,7 @@
                 <a:ea typeface="Calibri" pitchFamily="34" charset="-122"/>
                 <a:cs typeface="Calibri" pitchFamily="34" charset="-120"/>
               </a:rPr>
-              <a:t>0 &lt; −2</a:t>
+              <a:t>−6 &gt; −1</a:t>
             </a:r>
             <a:endParaRPr lang="en-US" sz="2000" dirty="0"/>
           </a:p>
@@ -8082,7 +8082,7 @@
                 <a:ea typeface="Calibri" pitchFamily="34" charset="-122"/>
                 <a:cs typeface="Calibri" pitchFamily="34" charset="-120"/>
               </a:rPr>
-              <a:t>−7</a:t>
+              <a:t>−5</a:t>
             </a:r>
             <a:endParaRPr lang="en-US" sz="2400" dirty="0"/>
           </a:p>
@@ -8119,7 +8119,7 @@
                 <a:ea typeface="Calibri" pitchFamily="34" charset="-122"/>
                 <a:cs typeface="Calibri" pitchFamily="34" charset="-120"/>
               </a:rPr>
-              <a:t>−5</a:t>
+              <a:t>−9</a:t>
             </a:r>
             <a:endParaRPr lang="en-US" sz="2400" dirty="0"/>
           </a:p>
@@ -8156,7 +8156,7 @@
                 <a:ea typeface="Calibri" pitchFamily="34" charset="-122"/>
                 <a:cs typeface="Calibri" pitchFamily="34" charset="-120"/>
               </a:rPr>
-              <a:t>−2</a:t>
+              <a:t>−7</a:t>
             </a:r>
             <a:endParaRPr lang="en-US" sz="2400" dirty="0"/>
           </a:p>
@@ -8193,7 +8193,7 @@
                 <a:ea typeface="Calibri" pitchFamily="34" charset="-122"/>
                 <a:cs typeface="Calibri" pitchFamily="34" charset="-120"/>
               </a:rPr>
-              <a:t>−9</a:t>
+              <a:t>−2</a:t>
             </a:r>
             <a:endParaRPr lang="en-US" sz="2400" dirty="0"/>
           </a:p>
@@ -8669,7 +8669,7 @@
                 <a:ea typeface="Calibri" pitchFamily="34" charset="-122"/>
                 <a:cs typeface="Calibri" pitchFamily="34" charset="-120"/>
               </a:rPr>
-              <a:t>5, 2, −1, −4</a:t>
+              <a:t>−1, −4, 5, 2</a:t>
             </a:r>
             <a:endParaRPr lang="en-US" sz="2400" dirty="0"/>
           </a:p>
@@ -8706,7 +8706,7 @@
                 <a:ea typeface="Calibri" pitchFamily="34" charset="-122"/>
                 <a:cs typeface="Calibri" pitchFamily="34" charset="-120"/>
               </a:rPr>
-              <a:t>−1, −4, 5, 2</a:t>
+              <a:t>5, 2, −1, −4</a:t>
             </a:r>
             <a:endParaRPr lang="en-US" sz="2400" dirty="0"/>
           </a:p>
@@ -9107,7 +9107,7 @@
                 <a:ea typeface="Calibri" pitchFamily="34" charset="-122"/>
                 <a:cs typeface="Calibri" pitchFamily="34" charset="-120"/>
               </a:rPr>
-              <a:t>C   −2</a:t>
+              <a:t>D   −2</a:t>
             </a:r>
             <a:endParaRPr lang="en-US" sz="2200" dirty="0"/>
           </a:p>

--- a/decks/maths-directed/maths-directed_ch1_number-line-ordering.pptx
+++ b/decks/maths-directed/maths-directed_ch1_number-line-ordering.pptx
@@ -121,47 +121,47 @@
   <p:extLst>
     <p:ext uri="{521415D9-36F7-43E2-AB2F-B90AF26B5E84}">
       <p14:sectionLst xmlns:p14="http://schemas.microsoft.com/office/powerpoint/2010/main">
-        <p14:section name="Opening" id="{1f4384d3-4c7f-370a-cd0f-2e3b782ccfd0}">
+        <p14:section name="Opening" id="{a05f7bf5-b750-b2c0-278d-cd6ecf15b9e7}">
           <p14:sldIdLst>
             <p14:sldId id="256"/>
           </p14:sldIdLst>
         </p14:section>
-        <p14:section name="Gate" id="{38d5eece-b98d-6468-9ad6-1efd9b7e1a6f}">
+        <p14:section name="Gate" id="{023fb494-ed70-ad3f-77f7-c804b9ebab76}">
           <p14:sldIdLst>
             <p14:sldId id="257"/>
             <p14:sldId id="258"/>
           </p14:sldIdLst>
         </p14:section>
-        <p14:section name="Pre-teach" id="{12eb9cb6-4cbd-8523-3e5d-33db2cc73167}">
+        <p14:section name="Pre-teach" id="{eb18b497-ee6b-8c6d-d09a-4927a17b010a}">
           <p14:sldIdLst>
             <p14:sldId id="259"/>
           </p14:sldIdLst>
         </p14:section>
-        <p14:section name="Read-along" id="{31251899-dc89-0771-ac13-cb809c20f322}">
+        <p14:section name="Read-along" id="{b85f1c52-f86a-0b35-a888-781368596f0c}">
           <p14:sldIdLst>
             <p14:sldId id="260"/>
             <p14:sldId id="261"/>
           </p14:sldIdLst>
         </p14:section>
-        <p14:section name="Teach" id="{af35b00a-9148-9b30-03a5-3c89a029cf99}">
+        <p14:section name="Teach" id="{101a8c15-a7ca-10c1-6280-bd7964f880d4}">
           <p14:sldIdLst>
             <p14:sldId id="262"/>
             <p14:sldId id="263"/>
             <p14:sldId id="264"/>
           </p14:sldIdLst>
         </p14:section>
-        <p14:section name="Routes" id="{4e2b87b0-a36d-2e05-9131-fd7c9a9d8fa5}">
+        <p14:section name="Routes" id="{486f3fa7-0c38-b53e-58f9-b7676b15327e}">
           <p14:sldIdLst>
             <p14:sldId id="265"/>
             <p14:sldId id="266"/>
           </p14:sldIdLst>
         </p14:section>
-        <p14:section name="Close" id="{a42a9907-d6f2-ddca-0194-14d810c40ad5}">
+        <p14:section name="Close" id="{ef9eb48c-c004-3465-633d-7f6bf5ccb00e}">
           <p14:sldIdLst>
             <p14:sldId id="267"/>
           </p14:sldIdLst>
         </p14:section>
-        <p14:section name="Answers" id="{9eb3d46b-263d-a4cb-950e-c07d722a972a}">
+        <p14:section name="Answers" id="{1ced156d-4932-8cde-a6cc-66f83ef09b61}">
           <p14:sldIdLst>
             <p14:sldId id="268"/>
             <p14:sldId id="269"/>
